--- a/PPT정리/31. 서브에이전트 활용 - RoadMap.pptx
+++ b/PPT정리/31. 서브에이전트 활용 - RoadMap.pptx
@@ -10,6 +10,7 @@
     <p:sldId id="258" r:id="rId4"/>
     <p:sldId id="259" r:id="rId5"/>
     <p:sldId id="260" r:id="rId6"/>
+    <p:sldId id="261" r:id="rId7"/>
   </p:sldIdLst>
   <p:sldSz cx="12192000" cy="6858000"/>
   <p:notesSz cx="6858000" cy="9144000"/>
@@ -108,6 +109,29 @@
       </a:defRPr>
     </a:lvl9pPr>
   </p:defaultTextStyle>
+  <p:extLst>
+    <p:ext uri="{521415D9-36F7-43E2-AB2F-B90AF26B5E84}">
+      <p14:sectionLst xmlns:p14="http://schemas.microsoft.com/office/powerpoint/2010/main">
+        <p14:section name="기본 구역" id="{2458E80A-4D91-4E56-B938-D02BCAC38098}">
+          <p14:sldIdLst>
+            <p14:sldId id="256"/>
+            <p14:sldId id="257"/>
+            <p14:sldId id="258"/>
+            <p14:sldId id="259"/>
+            <p14:sldId id="260"/>
+          </p14:sldIdLst>
+        </p14:section>
+        <p14:section name="PRD, ROADMAP" id="{A9C28F5E-89D2-44AD-8647-0054FF1CD4F4}">
+          <p14:sldIdLst>
+            <p14:sldId id="261"/>
+          </p14:sldIdLst>
+        </p14:section>
+      </p14:sectionLst>
+    </p:ext>
+    <p:ext uri="{EFAFB233-063F-42B5-8137-9DF3F51BA10A}">
+      <p15:sldGuideLst xmlns:p15="http://schemas.microsoft.com/office/powerpoint/2012/main"/>
+    </p:ext>
+  </p:extLst>
 </p:presentation>
 </file>
 
@@ -5841,6 +5865,367 @@
 </p:sld>
 </file>
 
+<file path=ppt/slides/slide6.xml><?xml version="1.0" encoding="utf-8"?>
+<p:sld xmlns:a="http://schemas.openxmlformats.org/drawingml/2006/main" xmlns:r="http://schemas.openxmlformats.org/officeDocument/2006/relationships" xmlns:p="http://schemas.openxmlformats.org/presentationml/2006/main">
+  <p:cSld>
+    <p:spTree>
+      <p:nvGrpSpPr>
+        <p:cNvPr id="1" name=""/>
+        <p:cNvGrpSpPr/>
+        <p:nvPr/>
+      </p:nvGrpSpPr>
+      <p:grpSpPr>
+        <a:xfrm>
+          <a:off x="0" y="0"/>
+          <a:ext cx="0" cy="0"/>
+          <a:chOff x="0" y="0"/>
+          <a:chExt cx="0" cy="0"/>
+        </a:xfrm>
+      </p:grpSpPr>
+      <p:sp>
+        <p:nvSpPr>
+          <p:cNvPr id="2" name="제목 1">
+            <a:extLst>
+              <a:ext uri="{FF2B5EF4-FFF2-40B4-BE49-F238E27FC236}">
+                <a16:creationId xmlns:a16="http://schemas.microsoft.com/office/drawing/2014/main" id="{9023139D-B3AC-F191-398E-2CD2B06BFA65}"/>
+              </a:ext>
+            </a:extLst>
+          </p:cNvPr>
+          <p:cNvSpPr>
+            <a:spLocks noGrp="1"/>
+          </p:cNvSpPr>
+          <p:nvPr>
+            <p:ph type="title"/>
+          </p:nvPr>
+        </p:nvSpPr>
+        <p:spPr/>
+        <p:txBody>
+          <a:bodyPr/>
+          <a:lstStyle/>
+          <a:p>
+            <a:r>
+              <a:rPr lang="en-US" altLang="ko-KR"/>
+              <a:t>PRD</a:t>
+            </a:r>
+            <a:r>
+              <a:rPr lang="ko-KR" altLang="en-US"/>
+              <a:t>와 </a:t>
+            </a:r>
+            <a:r>
+              <a:rPr lang="en-US" altLang="ko-KR"/>
+              <a:t>ROADMAP</a:t>
+            </a:r>
+            <a:r>
+              <a:rPr lang="ko-KR" altLang="en-US"/>
+              <a:t>의 차이</a:t>
+            </a:r>
+            <a:r>
+              <a:rPr lang="en-US" altLang="ko-KR"/>
+              <a:t>.</a:t>
+            </a:r>
+            <a:endParaRPr lang="ko-KR" altLang="en-US"/>
+          </a:p>
+        </p:txBody>
+      </p:sp>
+      <p:pic>
+        <p:nvPicPr>
+          <p:cNvPr id="4" name="그림 3">
+            <a:extLst>
+              <a:ext uri="{FF2B5EF4-FFF2-40B4-BE49-F238E27FC236}">
+                <a16:creationId xmlns:a16="http://schemas.microsoft.com/office/drawing/2014/main" id="{A2FA5400-3964-CEC1-3CAF-D44D9E6876C5}"/>
+              </a:ext>
+            </a:extLst>
+          </p:cNvPr>
+          <p:cNvPicPr>
+            <a:picLocks noChangeAspect="1"/>
+          </p:cNvPicPr>
+          <p:nvPr/>
+        </p:nvPicPr>
+        <p:blipFill>
+          <a:blip r:embed="rId2"/>
+          <a:stretch>
+            <a:fillRect/>
+          </a:stretch>
+        </p:blipFill>
+        <p:spPr>
+          <a:xfrm>
+            <a:off x="3069551" y="1754300"/>
+            <a:ext cx="5258534" cy="943107"/>
+          </a:xfrm>
+          <a:prstGeom prst="rect">
+            <a:avLst/>
+          </a:prstGeom>
+          <a:solidFill>
+            <a:schemeClr val="tx1"/>
+          </a:solidFill>
+        </p:spPr>
+      </p:pic>
+      <p:pic>
+        <p:nvPicPr>
+          <p:cNvPr id="6" name="그림 5">
+            <a:extLst>
+              <a:ext uri="{FF2B5EF4-FFF2-40B4-BE49-F238E27FC236}">
+                <a16:creationId xmlns:a16="http://schemas.microsoft.com/office/drawing/2014/main" id="{307985C1-689A-C1A4-4B21-D92A347C8807}"/>
+              </a:ext>
+            </a:extLst>
+          </p:cNvPr>
+          <p:cNvPicPr>
+            <a:picLocks noChangeAspect="1"/>
+          </p:cNvPicPr>
+          <p:nvPr/>
+        </p:nvPicPr>
+        <p:blipFill>
+          <a:blip r:embed="rId3"/>
+          <a:stretch>
+            <a:fillRect/>
+          </a:stretch>
+        </p:blipFill>
+        <p:spPr>
+          <a:xfrm>
+            <a:off x="748422" y="1754300"/>
+            <a:ext cx="2321129" cy="4817097"/>
+          </a:xfrm>
+          <a:prstGeom prst="rect">
+            <a:avLst/>
+          </a:prstGeom>
+        </p:spPr>
+      </p:pic>
+      <p:pic>
+        <p:nvPicPr>
+          <p:cNvPr id="8" name="그림 7">
+            <a:extLst>
+              <a:ext uri="{FF2B5EF4-FFF2-40B4-BE49-F238E27FC236}">
+                <a16:creationId xmlns:a16="http://schemas.microsoft.com/office/drawing/2014/main" id="{B9DEDF50-C3BC-2361-57E9-2E6404917212}"/>
+              </a:ext>
+            </a:extLst>
+          </p:cNvPr>
+          <p:cNvPicPr>
+            <a:picLocks noChangeAspect="1"/>
+          </p:cNvPicPr>
+          <p:nvPr/>
+        </p:nvPicPr>
+        <p:blipFill>
+          <a:blip r:embed="rId4"/>
+          <a:stretch>
+            <a:fillRect/>
+          </a:stretch>
+        </p:blipFill>
+        <p:spPr>
+          <a:xfrm>
+            <a:off x="5927286" y="2819675"/>
+            <a:ext cx="6184767" cy="3845990"/>
+          </a:xfrm>
+          <a:prstGeom prst="rect">
+            <a:avLst/>
+          </a:prstGeom>
+        </p:spPr>
+      </p:pic>
+      <p:sp>
+        <p:nvSpPr>
+          <p:cNvPr id="9" name="TextBox 8">
+            <a:extLst>
+              <a:ext uri="{FF2B5EF4-FFF2-40B4-BE49-F238E27FC236}">
+                <a16:creationId xmlns:a16="http://schemas.microsoft.com/office/drawing/2014/main" id="{0E3AF841-50EE-D43B-9824-45B8B0438AE2}"/>
+              </a:ext>
+            </a:extLst>
+          </p:cNvPr>
+          <p:cNvSpPr txBox="1"/>
+          <p:nvPr/>
+        </p:nvSpPr>
+        <p:spPr>
+          <a:xfrm>
+            <a:off x="3167406" y="2819675"/>
+            <a:ext cx="2620652" cy="2308324"/>
+          </a:xfrm>
+          <a:prstGeom prst="rect">
+            <a:avLst/>
+          </a:prstGeom>
+          <a:noFill/>
+        </p:spPr>
+        <p:txBody>
+          <a:bodyPr wrap="square" rtlCol="0">
+            <a:spAutoFit/>
+          </a:bodyPr>
+          <a:lstStyle/>
+          <a:p>
+            <a:r>
+              <a:rPr lang="ko-KR" altLang="en-US" sz="1200" b="1">
+                <a:solidFill>
+                  <a:srgbClr val="FF0000"/>
+                </a:solidFill>
+              </a:rPr>
+              <a:t>왼쪽</a:t>
+            </a:r>
+            <a:r>
+              <a:rPr lang="en-US" altLang="ko-KR" sz="1200" b="1">
+                <a:solidFill>
+                  <a:srgbClr val="FF0000"/>
+                </a:solidFill>
+              </a:rPr>
+              <a:t>(PRD) </a:t>
+            </a:r>
+            <a:r>
+              <a:rPr lang="en-US" altLang="ko-KR" sz="1200" b="1">
+                <a:solidFill>
+                  <a:srgbClr val="FF0000"/>
+                </a:solidFill>
+                <a:sym typeface="Wingdings" panose="05000000000000000000" pitchFamily="2" charset="2"/>
+              </a:rPr>
+              <a:t> </a:t>
+            </a:r>
+            <a:r>
+              <a:rPr lang="ko-KR" altLang="en-US" sz="1200">
+                <a:sym typeface="Wingdings" panose="05000000000000000000" pitchFamily="2" charset="2"/>
+              </a:rPr>
+              <a:t>기능에 대한 명세</a:t>
+            </a:r>
+            <a:br>
+              <a:rPr lang="en-US" altLang="ko-KR" sz="1200">
+                <a:sym typeface="Wingdings" panose="05000000000000000000" pitchFamily="2" charset="2"/>
+              </a:rPr>
+            </a:br>
+            <a:r>
+              <a:rPr lang="en-US" altLang="ko-KR" sz="1200">
+                <a:sym typeface="Wingdings" panose="05000000000000000000" pitchFamily="2" charset="2"/>
+              </a:rPr>
+              <a:t>                         </a:t>
+            </a:r>
+            <a:r>
+              <a:rPr lang="ko-KR" altLang="en-US" sz="1200">
+                <a:sym typeface="Wingdings" panose="05000000000000000000" pitchFamily="2" charset="2"/>
+              </a:rPr>
+              <a:t>기능의 흐름 </a:t>
+            </a:r>
+            <a:br>
+              <a:rPr lang="en-US" altLang="ko-KR" sz="1200">
+                <a:sym typeface="Wingdings" panose="05000000000000000000" pitchFamily="2" charset="2"/>
+              </a:rPr>
+            </a:br>
+            <a:br>
+              <a:rPr lang="en-US" altLang="ko-KR" sz="1200">
+                <a:sym typeface="Wingdings" panose="05000000000000000000" pitchFamily="2" charset="2"/>
+              </a:rPr>
+            </a:br>
+            <a:br>
+              <a:rPr lang="en-US" altLang="ko-KR" sz="1200">
+                <a:sym typeface="Wingdings" panose="05000000000000000000" pitchFamily="2" charset="2"/>
+              </a:rPr>
+            </a:br>
+            <a:r>
+              <a:rPr lang="ko-KR" altLang="en-US" sz="1200" b="1">
+                <a:solidFill>
+                  <a:srgbClr val="FF0000"/>
+                </a:solidFill>
+                <a:sym typeface="Wingdings" panose="05000000000000000000" pitchFamily="2" charset="2"/>
+              </a:rPr>
+              <a:t>오른쪽</a:t>
+            </a:r>
+            <a:r>
+              <a:rPr lang="en-US" altLang="ko-KR" sz="1200" b="1">
+                <a:solidFill>
+                  <a:srgbClr val="FF0000"/>
+                </a:solidFill>
+                <a:sym typeface="Wingdings" panose="05000000000000000000" pitchFamily="2" charset="2"/>
+              </a:rPr>
+              <a:t>(ROADMAP)  </a:t>
+            </a:r>
+            <a:br>
+              <a:rPr lang="en-US" altLang="ko-KR" sz="1200">
+                <a:sym typeface="Wingdings" panose="05000000000000000000" pitchFamily="2" charset="2"/>
+              </a:rPr>
+            </a:br>
+            <a:br>
+              <a:rPr lang="en-US" altLang="ko-KR" sz="1200">
+                <a:sym typeface="Wingdings" panose="05000000000000000000" pitchFamily="2" charset="2"/>
+              </a:rPr>
+            </a:br>
+            <a:r>
+              <a:rPr lang="ko-KR" altLang="en-US" sz="1200">
+                <a:sym typeface="Wingdings" panose="05000000000000000000" pitchFamily="2" charset="2"/>
+              </a:rPr>
+              <a:t>코드베이스</a:t>
+            </a:r>
+            <a:br>
+              <a:rPr lang="en-US" altLang="ko-KR" sz="1200">
+                <a:sym typeface="Wingdings" panose="05000000000000000000" pitchFamily="2" charset="2"/>
+              </a:rPr>
+            </a:br>
+            <a:r>
+              <a:rPr lang="en-US" altLang="ko-KR" sz="1200">
+                <a:sym typeface="Wingdings" panose="05000000000000000000" pitchFamily="2" charset="2"/>
+              </a:rPr>
+              <a:t>(CLAUDE.md </a:t>
+            </a:r>
+            <a:r>
+              <a:rPr lang="ko-KR" altLang="en-US" sz="1200">
+                <a:sym typeface="Wingdings" panose="05000000000000000000" pitchFamily="2" charset="2"/>
+              </a:rPr>
+              <a:t>내 기술 스택 및 컨벤션</a:t>
+            </a:r>
+            <a:r>
+              <a:rPr lang="en-US" altLang="ko-KR" sz="1200">
+                <a:sym typeface="Wingdings" panose="05000000000000000000" pitchFamily="2" charset="2"/>
+              </a:rPr>
+              <a:t>)</a:t>
+            </a:r>
+            <a:r>
+              <a:rPr lang="ko-KR" altLang="en-US" sz="1200">
+                <a:sym typeface="Wingdings" panose="05000000000000000000" pitchFamily="2" charset="2"/>
+              </a:rPr>
+              <a:t>를 기준으로 애플리케이션의 틀을 생성하고</a:t>
+            </a:r>
+            <a:r>
+              <a:rPr lang="en-US" altLang="ko-KR" sz="1200">
+                <a:sym typeface="Wingdings" panose="05000000000000000000" pitchFamily="2" charset="2"/>
+              </a:rPr>
+              <a:t>,</a:t>
+            </a:r>
+            <a:br>
+              <a:rPr lang="en-US" altLang="ko-KR" sz="1200">
+                <a:sym typeface="Wingdings" panose="05000000000000000000" pitchFamily="2" charset="2"/>
+              </a:rPr>
+            </a:br>
+            <a:r>
+              <a:rPr lang="ko-KR" altLang="en-US" sz="1200">
+                <a:sym typeface="Wingdings" panose="05000000000000000000" pitchFamily="2" charset="2"/>
+              </a:rPr>
+              <a:t>작업을 어떤방식이나 순서로 진행해 나갈 것인지</a:t>
+            </a:r>
+            <a:r>
+              <a:rPr lang="en-US" altLang="ko-KR" sz="1200">
+                <a:sym typeface="Wingdings" panose="05000000000000000000" pitchFamily="2" charset="2"/>
+              </a:rPr>
+              <a:t> </a:t>
+            </a:r>
+            <a:r>
+              <a:rPr lang="ko-KR" altLang="en-US" sz="1200">
+                <a:sym typeface="Wingdings" panose="05000000000000000000" pitchFamily="2" charset="2"/>
+              </a:rPr>
+              <a:t>명세</a:t>
+            </a:r>
+            <a:r>
+              <a:rPr lang="en-US" altLang="ko-KR" sz="1200">
+                <a:sym typeface="Wingdings" panose="05000000000000000000" pitchFamily="2" charset="2"/>
+              </a:rPr>
+              <a:t>.</a:t>
+            </a:r>
+            <a:endParaRPr lang="ko-KR" altLang="en-US" sz="1200"/>
+          </a:p>
+        </p:txBody>
+      </p:sp>
+    </p:spTree>
+    <p:extLst>
+      <p:ext uri="{BB962C8B-B14F-4D97-AF65-F5344CB8AC3E}">
+        <p14:creationId xmlns:p14="http://schemas.microsoft.com/office/powerpoint/2010/main" val="257512806"/>
+      </p:ext>
+    </p:extLst>
+  </p:cSld>
+  <p:clrMapOvr>
+    <a:masterClrMapping/>
+  </p:clrMapOvr>
+</p:sld>
+</file>
+
 <file path=ppt/theme/theme1.xml><?xml version="1.0" encoding="utf-8"?>
 <a:theme xmlns:a="http://schemas.openxmlformats.org/drawingml/2006/main" name="추억">
   <a:themeElements>
